--- a/05-AI应用基础48课时版/V1授课PPT/W19-第21次课-多智能体检修调度（上）：.pptx
+++ b/05-AI应用基础48课时版/V1授课PPT/W19-第21次课-多智能体检修调度（上）：.pptx
@@ -6,6 +6,7 @@
   </p:sldMasterIdLst>
   <p:sldIdLst>
     <p:sldId id="256" r:id="rId7"/>
+    <p:sldId id="283" r:id="rId34"/>
     <p:sldId id="257" r:id="rId8"/>
     <p:sldId id="258" r:id="rId9"/>
     <p:sldId id="259" r:id="rId10"/>
@@ -32,6 +33,8 @@
     <p:sldId id="277" r:id="rId28"/>
     <p:sldId id="278" r:id="rId29"/>
     <p:sldId id="279" r:id="rId30"/>
+    <p:sldId id="284" r:id="rId35"/>
+    <p:sldId id="285" r:id="rId36"/>
   </p:sldIdLst>
   <p:sldSz cx="12191695" cy="6858000" type="screen4x3"/>
   <p:notesSz cx="6858000" cy="9144000"/>
@@ -26937,6 +26940,251 @@
 </p:sld>
 </file>
 
+<file path=ppt/slides/slide28.xml><?xml version="1.0" encoding="utf-8"?>
+<p:sld xmlns:a="http://schemas.openxmlformats.org/drawingml/2006/main" xmlns:p="http://schemas.openxmlformats.org/presentationml/2006/main" xmlns:r="http://schemas.openxmlformats.org/officeDocument/2006/relationships">
+  <p:cSld>
+    <p:spTree>
+      <p:nvGrpSpPr>
+        <p:cNvPr id="1" name=""/>
+        <p:cNvGrpSpPr/>
+        <p:nvPr/>
+      </p:nvGrpSpPr>
+      <p:grpSpPr/>
+      <p:sp>
+        <p:nvSpPr>
+          <p:cNvPr id="2" name="TextBox 1"/>
+          <p:cNvSpPr txBox="1"/>
+          <p:nvPr/>
+        </p:nvSpPr>
+        <p:spPr>
+          <a:xfrm>
+            <a:off x="548640" y="320040"/>
+            <a:ext cx="11094415" cy="914400"/>
+          </a:xfrm>
+          <a:prstGeom prst="rect">
+            <a:avLst/>
+          </a:prstGeom>
+          <a:noFill/>
+        </p:spPr>
+        <p:txBody>
+          <a:bodyPr wrap="none">
+            <a:spAutoFit/>
+          </a:bodyPr>
+          <a:lstStyle/>
+          <a:p>
+            <a:r>
+              <a:rPr sz="3000" b="1"/>
+              <a:t>安全与合规警示（操作前必读）</a:t>
+            </a:r>
+          </a:p>
+        </p:txBody>
+      </p:sp>
+      <p:sp>
+        <p:nvSpPr>
+          <p:cNvPr id="3" name="TextBox 2"/>
+          <p:cNvSpPr txBox="1"/>
+          <p:nvPr/>
+        </p:nvSpPr>
+        <p:spPr>
+          <a:xfrm>
+            <a:off x="731520" y="1371600"/>
+            <a:ext cx="10728655" cy="4663440"/>
+          </a:xfrm>
+          <a:prstGeom prst="rect">
+            <a:avLst/>
+          </a:prstGeom>
+          <a:noFill/>
+        </p:spPr>
+        <p:txBody>
+          <a:bodyPr wrap="square">
+            <a:spAutoFit/>
+          </a:bodyPr>
+          <a:lstStyle/>
+          <a:p>
+            <a:pPr>
+              <a:spcAft>
+                <a:spcPts val="1000"/>
+              </a:spcAft>
+            </a:pPr>
+            <a:r>
+              <a:rPr sz="1800"/>
+              <a:t>1. 上机前确认本工位电源开关与急停位置，确认设备处于安全状态。</a:t>
+            </a:r>
+          </a:p>
+          <a:p>
+            <a:pPr>
+              <a:spcAft>
+                <a:spcPts val="1000"/>
+              </a:spcAft>
+            </a:pPr>
+            <a:r>
+              <a:rPr sz="1800"/>
+              <a:t>2. 涉及接线的操作一律先断电、后验电、再作业，禁止带电插拔。</a:t>
+            </a:r>
+          </a:p>
+          <a:p>
+            <a:pPr>
+              <a:spcAft>
+                <a:spcPts val="1000"/>
+              </a:spcAft>
+            </a:pPr>
+            <a:r>
+              <a:rPr sz="1800"/>
+              <a:t>3. 身体任何部位不进入设备运动/散热区域，长发束起，不佩戴悬垂饰物。</a:t>
+            </a:r>
+          </a:p>
+          <a:p>
+            <a:pPr>
+              <a:spcAft>
+                <a:spcPts val="1000"/>
+              </a:spcAft>
+            </a:pPr>
+            <a:r>
+              <a:rPr sz="1800"/>
+              <a:t>4. 调试程序前先静态检查、再低速小样本试运行，确认无异常后放大规模。</a:t>
+            </a:r>
+          </a:p>
+          <a:p>
+            <a:pPr>
+              <a:spcAft>
+                <a:spcPts val="1000"/>
+              </a:spcAft>
+            </a:pPr>
+            <a:r>
+              <a:rPr sz="1800"/>
+              <a:t>5. 任何不确定或异常情况，立即停止操作并报告指导教师，不擅自处置。</a:t>
+            </a:r>
+          </a:p>
+          <a:p>
+            <a:r>
+              <a:rPr sz="1400" b="1"/>
+              <a:t>以上任一条违反，本次任务按课程标准「安全规范一票否决」条款记 0 分并中止实训。</a:t>
+            </a:r>
+          </a:p>
+        </p:txBody>
+      </p:sp>
+    </p:spTree>
+  </p:cSld>
+  <p:clrMapOvr>
+    <a:masterClrMapping/>
+  </p:clrMapOvr>
+</p:sld>
+</file>
+
+<file path=ppt/slides/slide29.xml><?xml version="1.0" encoding="utf-8"?>
+<p:sld xmlns:a="http://schemas.openxmlformats.org/drawingml/2006/main" xmlns:p="http://schemas.openxmlformats.org/presentationml/2006/main" xmlns:r="http://schemas.openxmlformats.org/officeDocument/2006/relationships">
+  <p:cSld>
+    <p:spTree>
+      <p:nvGrpSpPr>
+        <p:cNvPr id="1" name=""/>
+        <p:cNvGrpSpPr/>
+        <p:nvPr/>
+      </p:nvGrpSpPr>
+      <p:grpSpPr/>
+      <p:sp>
+        <p:nvSpPr>
+          <p:cNvPr id="2" name="TextBox 1"/>
+          <p:cNvSpPr txBox="1"/>
+          <p:nvPr/>
+        </p:nvSpPr>
+        <p:spPr>
+          <a:xfrm>
+            <a:off x="548640" y="320040"/>
+            <a:ext cx="11094415" cy="914400"/>
+          </a:xfrm>
+          <a:prstGeom prst="rect">
+            <a:avLst/>
+          </a:prstGeom>
+          <a:noFill/>
+        </p:spPr>
+        <p:txBody>
+          <a:bodyPr wrap="none">
+            <a:spAutoFit/>
+          </a:bodyPr>
+          <a:lstStyle/>
+          <a:p>
+            <a:r>
+              <a:rPr sz="3000" b="1"/>
+              <a:t>本任务六步法导航</a:t>
+            </a:r>
+          </a:p>
+        </p:txBody>
+      </p:sp>
+      <p:sp>
+        <p:nvSpPr>
+          <p:cNvPr id="3" name="TextBox 2"/>
+          <p:cNvSpPr txBox="1"/>
+          <p:nvPr/>
+        </p:nvSpPr>
+        <p:spPr>
+          <a:xfrm>
+            <a:off x="731520" y="1371600"/>
+            <a:ext cx="10728655" cy="4663440"/>
+          </a:xfrm>
+          <a:prstGeom prst="rect">
+            <a:avLst/>
+          </a:prstGeom>
+          <a:noFill/>
+        </p:spPr>
+        <p:txBody>
+          <a:bodyPr wrap="square">
+            <a:spAutoFit/>
+          </a:bodyPr>
+          <a:lstStyle/>
+          <a:p>
+            <a:pPr>
+              <a:spcAft>
+                <a:spcPts val="1000"/>
+              </a:spcAft>
+            </a:pPr>
+            <a:r>
+              <a:rPr sz="1800"/>
+              <a:t>六步法：资讯 → 计划 → 决策 → 实施 → 检查 → 评估</a:t>
+            </a:r>
+          </a:p>
+          <a:p>
+            <a:pPr>
+              <a:spcAft>
+                <a:spcPts val="1000"/>
+              </a:spcAft>
+            </a:pPr>
+            <a:r>
+              <a:rPr sz="1800"/>
+              <a:t>本讲对应工单：《AI应用基础48课时版》分层任务工单</a:t>
+            </a:r>
+          </a:p>
+          <a:p>
+            <a:pPr>
+              <a:spcAft>
+                <a:spcPts val="1000"/>
+              </a:spcAft>
+            </a:pPr>
+            <a:r>
+              <a:rPr sz="1800"/>
+              <a:t>课堂产出：工单第六节实施记录须当堂填写，含操作前安全打勾与学生本人签字。</a:t>
+            </a:r>
+          </a:p>
+          <a:p>
+            <a:pPr>
+              <a:spcAft>
+                <a:spcPts val="1000"/>
+              </a:spcAft>
+            </a:pPr>
+            <a:r>
+              <a:rPr sz="1800"/>
+              <a:t>课后交付：班组长／操作员／教师三方联签后交回，缺签视为未交付。</a:t>
+            </a:r>
+          </a:p>
+        </p:txBody>
+      </p:sp>
+    </p:spTree>
+  </p:cSld>
+  <p:clrMapOvr>
+    <a:masterClrMapping/>
+  </p:clrMapOvr>
+</p:sld>
+</file>
+
 <file path=ppt/slides/slide3.xml><?xml version="1.0" encoding="utf-8"?>
 <p:sld xmlns:a="http://schemas.openxmlformats.org/drawingml/2006/main" xmlns:p="http://schemas.openxmlformats.org/presentationml/2006/main" xmlns:r="http://schemas.openxmlformats.org/officeDocument/2006/relationships">
   <p:cSld>
@@ -28287,6 +28535,120 @@
                 <a:ea typeface="Microsoft YaHei"/>
               </a:rPr>
               <a:t>小郑</a:t>
+            </a:r>
+          </a:p>
+        </p:txBody>
+      </p:sp>
+    </p:spTree>
+  </p:cSld>
+  <p:clrMapOvr>
+    <a:masterClrMapping/>
+  </p:clrMapOvr>
+</p:sld>
+</file>
+
+<file path=ppt/slides/slide30.xml><?xml version="1.0" encoding="utf-8"?>
+<p:sld xmlns:a="http://schemas.openxmlformats.org/drawingml/2006/main" xmlns:p="http://schemas.openxmlformats.org/presentationml/2006/main" xmlns:r="http://schemas.openxmlformats.org/officeDocument/2006/relationships">
+  <p:cSld>
+    <p:spTree>
+      <p:nvGrpSpPr>
+        <p:cNvPr id="1" name=""/>
+        <p:cNvGrpSpPr/>
+        <p:nvPr/>
+      </p:nvGrpSpPr>
+      <p:grpSpPr/>
+      <p:sp>
+        <p:nvSpPr>
+          <p:cNvPr id="2" name="TextBox 1"/>
+          <p:cNvSpPr txBox="1"/>
+          <p:nvPr/>
+        </p:nvSpPr>
+        <p:spPr>
+          <a:xfrm>
+            <a:off x="548640" y="320040"/>
+            <a:ext cx="11094415" cy="914400"/>
+          </a:xfrm>
+          <a:prstGeom prst="rect">
+            <a:avLst/>
+          </a:prstGeom>
+          <a:noFill/>
+        </p:spPr>
+        <p:txBody>
+          <a:bodyPr wrap="none">
+            <a:spAutoFit/>
+          </a:bodyPr>
+          <a:lstStyle/>
+          <a:p>
+            <a:r>
+              <a:rPr sz="3000" b="1"/>
+              <a:t>本讲与岗位任务单的衔接</a:t>
+            </a:r>
+          </a:p>
+        </p:txBody>
+      </p:sp>
+      <p:sp>
+        <p:nvSpPr>
+          <p:cNvPr id="3" name="TextBox 2"/>
+          <p:cNvSpPr txBox="1"/>
+          <p:nvPr/>
+        </p:nvSpPr>
+        <p:spPr>
+          <a:xfrm>
+            <a:off x="731520" y="1371600"/>
+            <a:ext cx="10728655" cy="4663440"/>
+          </a:xfrm>
+          <a:prstGeom prst="rect">
+            <a:avLst/>
+          </a:prstGeom>
+          <a:noFill/>
+        </p:spPr>
+        <p:txBody>
+          <a:bodyPr wrap="square">
+            <a:spAutoFit/>
+          </a:bodyPr>
+          <a:lstStyle/>
+          <a:p>
+            <a:pPr>
+              <a:spcAft>
+                <a:spcPts val="1000"/>
+              </a:spcAft>
+            </a:pPr>
+            <a:r>
+              <a:rPr sz="1800"/>
+              <a:t>本讲在工作过程系统化课程中承担的任务环节：任务实施</a:t>
+            </a:r>
+          </a:p>
+          <a:p>
+            <a:pPr>
+              <a:spcAft>
+                <a:spcPts val="1000"/>
+              </a:spcAft>
+            </a:pPr>
+            <a:r>
+              <a:rPr sz="1800"/>
+              <a:t>考核对齐：过程性成绩取自本讲工单第六节各模块得分合计（满分 100）。</a:t>
+            </a:r>
+          </a:p>
+          <a:p>
+            <a:pPr>
+              <a:spcAft>
+                <a:spcPts val="1000"/>
+              </a:spcAft>
+            </a:pPr>
+            <a:r>
+              <a:rPr sz="1800"/>
+              <a:t>达标线：综合成绩≥60 分，且无安全红线一票否决记录</a:t>
+            </a:r>
+          </a:p>
+          <a:p>
+            <a:pPr>
+              <a:spcAft>
+                <a:spcPts val="1000"/>
+              </a:spcAft>
+            </a:pPr>
+            <a:r>
+              <a:rPr sz="1800"/>
+              <a:t>无效工单判定：未打安全勾、无本人签字、无三方联签。</a:t>
             </a:r>
           </a:p>
         </p:txBody>
